--- a/classes/parte-6-analisis-de-malware/143-analisis-estatico-basico/clase-143-presentacion.pptx
+++ b/classes/parte-6-analisis-de-malware/143-analisis-estatico-basico/clase-143-presentacion.pptx
@@ -17,6 +17,9 @@
     <p:sldId id="265" r:id="rId16"/>
     <p:sldId id="266" r:id="rId17"/>
     <p:sldId id="267" r:id="rId18"/>
+    <p:sldId id="268" r:id="rId19"/>
+    <p:sldId id="269" r:id="rId20"/>
+    <p:sldId id="270" r:id="rId21"/>
   </p:sldIdLst>
   <p:sldSz cx="9144000" cy="6858000" type="screen4x3"/>
   <p:notesSz cx="6858000" cy="9144000"/>
@@ -3198,7 +3201,7 @@
                   <a:srgbClr val="0B3D2E"/>
                 </a:solidFill>
               </a:rPr>
-              <a:t>⚠️ Errores comunes</a:t>
+              <a:t>✍️ Ejercicios</a:t>
             </a:r>
           </a:p>
         </p:txBody>
@@ -3236,67 +3239,82 @@
                   <a:srgbClr val="22282E"/>
                 </a:solidFill>
               </a:rPr>
-              <a:t>•  "No hay strings útiles" — Muestra empaquetada; los strings aparecen tras desempacar</a:t>
-            </a:r>
-          </a:p>
-          <a:p>
-            <a:pPr>
-              <a:spcAft>
-                <a:spcPts val="600"/>
-              </a:spcAft>
-            </a:pPr>
-            <a:r>
-              <a:rPr sz="1500">
-                <a:solidFill>
-                  <a:srgbClr val="22282E"/>
-                </a:solidFill>
-              </a:rPr>
-              <a:t>•  Confiar en el timestamp de PE — Es falsificable; no lo uses como prueba fuerte</a:t>
-            </a:r>
-          </a:p>
-          <a:p>
-            <a:pPr>
-              <a:spcAft>
-                <a:spcPts val="600"/>
-              </a:spcAft>
-            </a:pPr>
-            <a:r>
-              <a:rPr sz="1500">
-                <a:solidFill>
-                  <a:srgbClr val="22282E"/>
-                </a:solidFill>
-              </a:rPr>
-              <a:t>•  Pocos imports visibles — Imports resueltos dinámicamente; revisa GetProcAddress/LoadLibrary</a:t>
-            </a:r>
-          </a:p>
-          <a:p>
-            <a:pPr>
-              <a:spcAft>
-                <a:spcPts val="600"/>
-              </a:spcAft>
-            </a:pPr>
-            <a:r>
-              <a:rPr sz="1500">
-                <a:solidFill>
-                  <a:srgbClr val="22282E"/>
-                </a:solidFill>
-              </a:rPr>
-              <a:t>•  Entropía alta = siempre malware — Muchos instaladores legítimos también se comprimen; correlaciona</a:t>
-            </a:r>
-          </a:p>
-          <a:p>
-            <a:pPr>
-              <a:spcAft>
-                <a:spcPts val="600"/>
-              </a:spcAft>
-            </a:pPr>
-            <a:r>
-              <a:rPr sz="1500">
-                <a:solidFill>
-                  <a:srgbClr val="22282E"/>
-                </a:solidFill>
-              </a:rPr>
-              <a:t>•  Subir la muestra a VT sin permiso — Puede filtrar información sensible; consulta por hash primero</a:t>
+              <a:t>•  Explica qué capacidad sugiere cada una de 6 APIs importadas.</a:t>
+            </a:r>
+          </a:p>
+          <a:p>
+            <a:pPr>
+              <a:spcAft>
+                <a:spcPts val="600"/>
+              </a:spcAft>
+            </a:pPr>
+            <a:r>
+              <a:rPr sz="1500">
+                <a:solidFill>
+                  <a:srgbClr val="22282E"/>
+                </a:solidFill>
+              </a:rPr>
+              <a:t>•  Compara el imphash de dos muestras y decide si podrían ser de la misma familia.</a:t>
+            </a:r>
+          </a:p>
+          <a:p>
+            <a:pPr>
+              <a:spcAft>
+                <a:spcPts val="600"/>
+              </a:spcAft>
+            </a:pPr>
+            <a:r>
+              <a:rPr sz="1500">
+                <a:solidFill>
+                  <a:srgbClr val="22282E"/>
+                </a:solidFill>
+              </a:rPr>
+              <a:t>•  Interpreta un strings.txt y extrae 5 IOCs candidatos.</a:t>
+            </a:r>
+          </a:p>
+          <a:p>
+            <a:pPr>
+              <a:spcAft>
+                <a:spcPts val="600"/>
+              </a:spcAft>
+            </a:pPr>
+            <a:r>
+              <a:rPr sz="1500">
+                <a:solidFill>
+                  <a:srgbClr val="22282E"/>
+                </a:solidFill>
+              </a:rPr>
+              <a:t>•  Justifica por qué una entropía de 7.9 en .rsrc es sospechosa.</a:t>
+            </a:r>
+          </a:p>
+          <a:p>
+            <a:pPr>
+              <a:spcAft>
+                <a:spcPts val="600"/>
+              </a:spcAft>
+            </a:pPr>
+            <a:r>
+              <a:rPr sz="1500">
+                <a:solidFill>
+                  <a:srgbClr val="22282E"/>
+                </a:solidFill>
+              </a:rPr>
+              <a:t>•  Usa capa y traduce 3 reglas disparadas a lenguaje llano.</a:t>
+            </a:r>
+          </a:p>
+          <a:p>
+            <a:pPr>
+              <a:spcAft>
+                <a:spcPts val="600"/>
+              </a:spcAft>
+            </a:pPr>
+            <a:r>
+              <a:rPr sz="1500">
+                <a:solidFill>
+                  <a:srgbClr val="22282E"/>
+                </a:solidFill>
+              </a:rPr>
+              <a:t>•  Documenta por qué el timestamp de compilación puede estar falseado.</a:t>
             </a:r>
           </a:p>
         </p:txBody>
@@ -3347,7 +3365,7 @@
                   <a:srgbClr val="0B3D2E"/>
                 </a:solidFill>
               </a:rPr>
-              <a:t>❓ Preguntas frecuentes</a:t>
+              <a:t>📝 Reto verificable</a:t>
             </a:r>
           </a:p>
         </p:txBody>
@@ -3385,37 +3403,22 @@
                   <a:srgbClr val="22282E"/>
                 </a:solidFill>
               </a:rPr>
-              <a:t>•  ❓ ¿El análisis estático basta? Para triaje sí, pero packing y resolución dinámica de APIs limitan lo que ves. Se complementa con análisis dinámico y desensamblado.</a:t>
-            </a:r>
-          </a:p>
-          <a:p>
-            <a:pPr>
-              <a:spcAft>
-                <a:spcPts val="600"/>
-              </a:spcAft>
-            </a:pPr>
-            <a:r>
-              <a:rPr sz="1500">
-                <a:solidFill>
-                  <a:srgbClr val="22282E"/>
-                </a:solidFill>
-              </a:rPr>
-              <a:t>•  ❓ ¿Por qué usar imphash? Porque agrupa muestras compiladas de forma similar aunque cambien strings o payload, útil para pivotar en inteligencia.</a:t>
-            </a:r>
-          </a:p>
-          <a:p>
-            <a:pPr>
-              <a:spcAft>
-                <a:spcPts val="600"/>
-              </a:spcAft>
-            </a:pPr>
-            <a:r>
-              <a:rPr sz="1500">
-                <a:solidFill>
-                  <a:srgbClr val="22282E"/>
-                </a:solidFill>
-              </a:rPr>
-              <a:t>•  ❓ ¿Debo subir la muestra a VirtualTotal? Consulta primero por hash. Subir el binario lo hace público para otros y puede alertar al atacante.</a:t>
+              <a:t>•  Produce una ficha de triaje estático de una muestra con: hashes (incl. imphash y ssdeep), 8 strings relevantes clasificados, 6 imports con su implicación, veredicto de packing con entropía, y familia…</a:t>
+            </a:r>
+          </a:p>
+          <a:p>
+            <a:pPr>
+              <a:spcAft>
+                <a:spcPts val="600"/>
+              </a:spcAft>
+            </a:pPr>
+            <a:r>
+              <a:rPr sz="1500">
+                <a:solidFill>
+                  <a:srgbClr val="22282E"/>
+                </a:solidFill>
+              </a:rPr>
+              <a:t>•  Criterio de aceptación: cada afirmación de capacidad está respaldada por un import o string concreto citado en la ficha, y el veredicto de packing incluye el valor de entropía observado.</a:t>
             </a:r>
           </a:p>
         </p:txBody>
@@ -3466,7 +3469,7 @@
                   <a:srgbClr val="0B3D2E"/>
                 </a:solidFill>
               </a:rPr>
-              <a:t>🔗 Referencias</a:t>
+              <a:t>⚠️ Errores comunes</a:t>
             </a:r>
           </a:p>
         </p:txBody>
@@ -3504,6 +3507,274 @@
                   <a:srgbClr val="22282E"/>
                 </a:solidFill>
               </a:rPr>
+              <a:t>•  "No hay strings útiles" — Muestra empaquetada; los strings aparecen tras desempacar</a:t>
+            </a:r>
+          </a:p>
+          <a:p>
+            <a:pPr>
+              <a:spcAft>
+                <a:spcPts val="600"/>
+              </a:spcAft>
+            </a:pPr>
+            <a:r>
+              <a:rPr sz="1500">
+                <a:solidFill>
+                  <a:srgbClr val="22282E"/>
+                </a:solidFill>
+              </a:rPr>
+              <a:t>•  Confiar en el timestamp de PE — Es falsificable; no lo uses como prueba fuerte</a:t>
+            </a:r>
+          </a:p>
+          <a:p>
+            <a:pPr>
+              <a:spcAft>
+                <a:spcPts val="600"/>
+              </a:spcAft>
+            </a:pPr>
+            <a:r>
+              <a:rPr sz="1500">
+                <a:solidFill>
+                  <a:srgbClr val="22282E"/>
+                </a:solidFill>
+              </a:rPr>
+              <a:t>•  Pocos imports visibles — Imports resueltos dinámicamente; revisa GetProcAddress/LoadLibrary</a:t>
+            </a:r>
+          </a:p>
+          <a:p>
+            <a:pPr>
+              <a:spcAft>
+                <a:spcPts val="600"/>
+              </a:spcAft>
+            </a:pPr>
+            <a:r>
+              <a:rPr sz="1500">
+                <a:solidFill>
+                  <a:srgbClr val="22282E"/>
+                </a:solidFill>
+              </a:rPr>
+              <a:t>•  Entropía alta = siempre malware — Muchos instaladores legítimos también se comprimen; correlaciona</a:t>
+            </a:r>
+          </a:p>
+          <a:p>
+            <a:pPr>
+              <a:spcAft>
+                <a:spcPts val="600"/>
+              </a:spcAft>
+            </a:pPr>
+            <a:r>
+              <a:rPr sz="1500">
+                <a:solidFill>
+                  <a:srgbClr val="22282E"/>
+                </a:solidFill>
+              </a:rPr>
+              <a:t>•  Subir la muestra a VT sin permiso — Puede filtrar información sensible; consulta por hash primero</a:t>
+            </a:r>
+          </a:p>
+        </p:txBody>
+      </p:sp>
+    </p:spTree>
+  </p:cSld>
+  <p:clrMapOvr>
+    <a:masterClrMapping/>
+  </p:clrMapOvr>
+</p:sld>
+</file>
+
+<file path=ppt/slides/slide13.xml><?xml version="1.0" encoding="utf-8"?>
+<p:sld xmlns:a="http://schemas.openxmlformats.org/drawingml/2006/main" xmlns:p="http://schemas.openxmlformats.org/presentationml/2006/main" xmlns:r="http://schemas.openxmlformats.org/officeDocument/2006/relationships">
+  <p:cSld>
+    <p:spTree>
+      <p:nvGrpSpPr>
+        <p:cNvPr id="1" name=""/>
+        <p:cNvGrpSpPr/>
+        <p:nvPr/>
+      </p:nvGrpSpPr>
+      <p:grpSpPr/>
+      <p:sp>
+        <p:nvSpPr>
+          <p:cNvPr id="2" name="TextBox 1"/>
+          <p:cNvSpPr txBox="1"/>
+          <p:nvPr/>
+        </p:nvSpPr>
+        <p:spPr>
+          <a:xfrm>
+            <a:off x="457200" y="320040"/>
+            <a:ext cx="8229600" cy="822960"/>
+          </a:xfrm>
+          <a:prstGeom prst="rect">
+            <a:avLst/>
+          </a:prstGeom>
+          <a:noFill/>
+        </p:spPr>
+        <p:txBody>
+          <a:bodyPr wrap="square">
+            <a:spAutoFit/>
+          </a:bodyPr>
+          <a:lstStyle/>
+          <a:p>
+            <a:r>
+              <a:rPr sz="2600" b="1">
+                <a:solidFill>
+                  <a:srgbClr val="0B3D2E"/>
+                </a:solidFill>
+              </a:rPr>
+              <a:t>❓ Preguntas frecuentes</a:t>
+            </a:r>
+          </a:p>
+        </p:txBody>
+      </p:sp>
+      <p:sp>
+        <p:nvSpPr>
+          <p:cNvPr id="3" name="TextBox 2"/>
+          <p:cNvSpPr txBox="1"/>
+          <p:nvPr/>
+        </p:nvSpPr>
+        <p:spPr>
+          <a:xfrm>
+            <a:off x="457200" y="1280160"/>
+            <a:ext cx="8229600" cy="4937760"/>
+          </a:xfrm>
+          <a:prstGeom prst="rect">
+            <a:avLst/>
+          </a:prstGeom>
+          <a:noFill/>
+        </p:spPr>
+        <p:txBody>
+          <a:bodyPr wrap="square">
+            <a:spAutoFit/>
+          </a:bodyPr>
+          <a:lstStyle/>
+          <a:p>
+            <a:pPr>
+              <a:spcAft>
+                <a:spcPts val="600"/>
+              </a:spcAft>
+            </a:pPr>
+            <a:r>
+              <a:rPr sz="1500">
+                <a:solidFill>
+                  <a:srgbClr val="22282E"/>
+                </a:solidFill>
+              </a:rPr>
+              <a:t>•  ❓ ¿El análisis estático basta? Para triaje sí, pero packing y resolución dinámica de APIs limitan lo que ves. Se complementa con análisis dinámico y desensamblado.</a:t>
+            </a:r>
+          </a:p>
+          <a:p>
+            <a:pPr>
+              <a:spcAft>
+                <a:spcPts val="600"/>
+              </a:spcAft>
+            </a:pPr>
+            <a:r>
+              <a:rPr sz="1500">
+                <a:solidFill>
+                  <a:srgbClr val="22282E"/>
+                </a:solidFill>
+              </a:rPr>
+              <a:t>•  ❓ ¿Por qué usar imphash? Porque agrupa muestras compiladas de forma similar aunque cambien strings o payload, útil para pivotar en inteligencia.</a:t>
+            </a:r>
+          </a:p>
+          <a:p>
+            <a:pPr>
+              <a:spcAft>
+                <a:spcPts val="600"/>
+              </a:spcAft>
+            </a:pPr>
+            <a:r>
+              <a:rPr sz="1500">
+                <a:solidFill>
+                  <a:srgbClr val="22282E"/>
+                </a:solidFill>
+              </a:rPr>
+              <a:t>•  ❓ ¿Debo subir la muestra a VirtualTotal? Consulta primero por hash. Subir el binario lo hace público para otros y puede alertar al atacante.</a:t>
+            </a:r>
+          </a:p>
+        </p:txBody>
+      </p:sp>
+    </p:spTree>
+  </p:cSld>
+  <p:clrMapOvr>
+    <a:masterClrMapping/>
+  </p:clrMapOvr>
+</p:sld>
+</file>
+
+<file path=ppt/slides/slide14.xml><?xml version="1.0" encoding="utf-8"?>
+<p:sld xmlns:a="http://schemas.openxmlformats.org/drawingml/2006/main" xmlns:p="http://schemas.openxmlformats.org/presentationml/2006/main" xmlns:r="http://schemas.openxmlformats.org/officeDocument/2006/relationships">
+  <p:cSld>
+    <p:spTree>
+      <p:nvGrpSpPr>
+        <p:cNvPr id="1" name=""/>
+        <p:cNvGrpSpPr/>
+        <p:nvPr/>
+      </p:nvGrpSpPr>
+      <p:grpSpPr/>
+      <p:sp>
+        <p:nvSpPr>
+          <p:cNvPr id="2" name="TextBox 1"/>
+          <p:cNvSpPr txBox="1"/>
+          <p:nvPr/>
+        </p:nvSpPr>
+        <p:spPr>
+          <a:xfrm>
+            <a:off x="457200" y="320040"/>
+            <a:ext cx="8229600" cy="822960"/>
+          </a:xfrm>
+          <a:prstGeom prst="rect">
+            <a:avLst/>
+          </a:prstGeom>
+          <a:noFill/>
+        </p:spPr>
+        <p:txBody>
+          <a:bodyPr wrap="square">
+            <a:spAutoFit/>
+          </a:bodyPr>
+          <a:lstStyle/>
+          <a:p>
+            <a:r>
+              <a:rPr sz="2600" b="1">
+                <a:solidFill>
+                  <a:srgbClr val="0B3D2E"/>
+                </a:solidFill>
+              </a:rPr>
+              <a:t>🔗 Referencias</a:t>
+            </a:r>
+          </a:p>
+        </p:txBody>
+      </p:sp>
+      <p:sp>
+        <p:nvSpPr>
+          <p:cNvPr id="3" name="TextBox 2"/>
+          <p:cNvSpPr txBox="1"/>
+          <p:nvPr/>
+        </p:nvSpPr>
+        <p:spPr>
+          <a:xfrm>
+            <a:off x="457200" y="1280160"/>
+            <a:ext cx="8229600" cy="4937760"/>
+          </a:xfrm>
+          <a:prstGeom prst="rect">
+            <a:avLst/>
+          </a:prstGeom>
+          <a:noFill/>
+        </p:spPr>
+        <p:txBody>
+          <a:bodyPr wrap="square">
+            <a:spAutoFit/>
+          </a:bodyPr>
+          <a:lstStyle/>
+          <a:p>
+            <a:pPr>
+              <a:spcAft>
+                <a:spcPts val="600"/>
+              </a:spcAft>
+            </a:pPr>
+            <a:r>
+              <a:rPr sz="1500">
+                <a:solidFill>
+                  <a:srgbClr val="22282E"/>
+                </a:solidFill>
+              </a:rPr>
               <a:t>•  Sikorski &amp; Honig, Practical Malware Analysis, cap. 1.</a:t>
             </a:r>
           </a:p>
@@ -3569,6 +3840,81 @@
           </a:p>
         </p:txBody>
       </p:sp>
+    </p:spTree>
+  </p:cSld>
+  <p:clrMapOvr>
+    <a:masterClrMapping/>
+  </p:clrMapOvr>
+</p:sld>
+</file>
+
+<file path=ppt/slides/slide15.xml><?xml version="1.0" encoding="utf-8"?>
+<p:sld xmlns:a="http://schemas.openxmlformats.org/drawingml/2006/main" xmlns:p="http://schemas.openxmlformats.org/presentationml/2006/main" xmlns:r="http://schemas.openxmlformats.org/officeDocument/2006/relationships">
+  <p:cSld>
+    <p:spTree>
+      <p:nvGrpSpPr>
+        <p:cNvPr id="1" name=""/>
+        <p:cNvGrpSpPr/>
+        <p:nvPr/>
+      </p:nvGrpSpPr>
+      <p:grpSpPr/>
+      <p:sp>
+        <p:nvSpPr>
+          <p:cNvPr id="2" name="TextBox 1"/>
+          <p:cNvSpPr txBox="1"/>
+          <p:nvPr/>
+        </p:nvSpPr>
+        <p:spPr>
+          <a:xfrm>
+            <a:off x="457200" y="274320"/>
+            <a:ext cx="8229600" cy="640080"/>
+          </a:xfrm>
+          <a:prstGeom prst="rect">
+            <a:avLst/>
+          </a:prstGeom>
+          <a:noFill/>
+        </p:spPr>
+        <p:txBody>
+          <a:bodyPr wrap="square">
+            <a:spAutoFit/>
+          </a:bodyPr>
+          <a:lstStyle/>
+          <a:p>
+            <a:r>
+              <a:rPr sz="2200" b="1">
+                <a:solidFill>
+                  <a:srgbClr val="0B3D2E"/>
+                </a:solidFill>
+              </a:rPr>
+              <a:t>Diagrama de la clase</a:t>
+            </a:r>
+          </a:p>
+        </p:txBody>
+      </p:sp>
+      <p:pic>
+        <p:nvPicPr>
+          <p:cNvPr id="3" name="Picture 2" descr="a5a94fba851cd44c.png"/>
+          <p:cNvPicPr>
+            <a:picLocks noChangeAspect="1"/>
+          </p:cNvPicPr>
+          <p:nvPr/>
+        </p:nvPicPr>
+        <p:blipFill>
+          <a:blip r:embed="rId2"/>
+          <a:stretch>
+            <a:fillRect/>
+          </a:stretch>
+        </p:blipFill>
+        <p:spPr>
+          <a:xfrm>
+            <a:off x="765646" y="1097280"/>
+            <a:ext cx="7612708" cy="5303520"/>
+          </a:xfrm>
+          <a:prstGeom prst="rect">
+            <a:avLst/>
+          </a:prstGeom>
+        </p:spPr>
+      </p:pic>
     </p:spTree>
   </p:cSld>
   <p:clrMapOvr>
@@ -3653,7 +3999,7 @@
                   <a:srgbClr val="22282E"/>
                 </a:solidFill>
               </a:rPr>
-              <a:t>•  Extraer el máximo de información de una muestra sin ejecutarla: hashes, strings, imports, entropía, recursos y firmas. El análisis estático básico es el primer filtro del triaje: en minutos permite decidir si la muestra es interesante, con qué familia se relaciona y qué capacidades sugiere su código.</a:t>
+              <a:t>•  Extraer el máximo de información de una muestra sin ejecutarla: hashes, strings, imports, entropía, recursos y firmas. El análisis estático básico es el primer filtro del triaje: en minutos permite…</a:t>
             </a:r>
           </a:p>
         </p:txBody>
@@ -4047,7 +4393,7 @@
                   <a:srgbClr val="0B3D2E"/>
                 </a:solidFill>
               </a:rPr>
-              <a:t>📖 Definiciones y características</a:t>
+              <a:t>🧠 Explicación en profundidad</a:t>
             </a:r>
           </a:p>
         </p:txBody>
@@ -4085,82 +4431,97 @@
                   <a:srgbClr val="22282E"/>
                 </a:solidFill>
               </a:rPr>
-              <a:t>•  Hash criptográfico: huella única (SHA-256) de la muestra. Característica clave: identidad exacta.</a:t>
-            </a:r>
-          </a:p>
-          <a:p>
-            <a:pPr>
-              <a:spcAft>
-                <a:spcPts val="600"/>
-              </a:spcAft>
-            </a:pPr>
-            <a:r>
-              <a:rPr sz="1500">
-                <a:solidFill>
-                  <a:srgbClr val="22282E"/>
-                </a:solidFill>
-              </a:rPr>
-              <a:t>•  imphash: hash de la tabla de imports. Característica clave: agrupa variantes con el mismo compilador/estructura.</a:t>
-            </a:r>
-          </a:p>
-          <a:p>
-            <a:pPr>
-              <a:spcAft>
-                <a:spcPts val="600"/>
-              </a:spcAft>
-            </a:pPr>
-            <a:r>
-              <a:rPr sz="1500">
-                <a:solidFill>
-                  <a:srgbClr val="22282E"/>
-                </a:solidFill>
-              </a:rPr>
-              <a:t>•  ssdeep (fuzzy hash): mide similitud entre archivos. Característica clave: detecta parecidos, no idénticos.</a:t>
-            </a:r>
-          </a:p>
-          <a:p>
-            <a:pPr>
-              <a:spcAft>
-                <a:spcPts val="600"/>
-              </a:spcAft>
-            </a:pPr>
-            <a:r>
-              <a:rPr sz="1500">
-                <a:solidFill>
-                  <a:srgbClr val="22282E"/>
-                </a:solidFill>
-              </a:rPr>
-              <a:t>•  String: secuencia de caracteres legible en el binario. Característica clave: pistas de comportamiento.</a:t>
-            </a:r>
-          </a:p>
-          <a:p>
-            <a:pPr>
-              <a:spcAft>
-                <a:spcPts val="600"/>
-              </a:spcAft>
-            </a:pPr>
-            <a:r>
-              <a:rPr sz="1500">
-                <a:solidFill>
-                  <a:srgbClr val="22282E"/>
-                </a:solidFill>
-              </a:rPr>
-              <a:t>•  Entropía: medida de aleatoriedad (0–8 bits/byte). Característica clave: &gt;7 sugiere packing/cifrado.</a:t>
-            </a:r>
-          </a:p>
-          <a:p>
-            <a:pPr>
-              <a:spcAft>
-                <a:spcPts val="600"/>
-              </a:spcAft>
-            </a:pPr>
-            <a:r>
-              <a:rPr sz="1500">
-                <a:solidFill>
-                  <a:srgbClr val="22282E"/>
-                </a:solidFill>
-              </a:rPr>
-              <a:t>•  Import: función de una DLL que el binario usa. Característica clave: infiere capacidades.</a:t>
+              <a:t>•  El análisis estático básico extrae información de una muestra sin ejecutarla, y es siempre el</a:t>
+            </a:r>
+          </a:p>
+          <a:p>
+            <a:pPr>
+              <a:spcAft>
+                <a:spcPts val="600"/>
+              </a:spcAft>
+            </a:pPr>
+            <a:r>
+              <a:rPr sz="1500">
+                <a:solidFill>
+                  <a:srgbClr val="22282E"/>
+                </a:solidFill>
+              </a:rPr>
+              <a:t>•  primer paso: es seguro (no hay riesgo de infección), rápido, y a menudo revela lo suficiente para</a:t>
+            </a:r>
+          </a:p>
+          <a:p>
+            <a:pPr>
+              <a:spcAft>
+                <a:spcPts val="600"/>
+              </a:spcAft>
+            </a:pPr>
+            <a:r>
+              <a:rPr sz="1500">
+                <a:solidFill>
+                  <a:srgbClr val="22282E"/>
+                </a:solidFill>
+              </a:rPr>
+              <a:t>•  clasificar la muestra o decidir cómo seguir. Su lógica es exprimir el fichero —sus metadatos, sus</a:t>
+            </a:r>
+          </a:p>
+          <a:p>
+            <a:pPr>
+              <a:spcAft>
+                <a:spcPts val="600"/>
+              </a:spcAft>
+            </a:pPr>
+            <a:r>
+              <a:rPr sz="1500">
+                <a:solidFill>
+                  <a:srgbClr val="22282E"/>
+                </a:solidFill>
+              </a:rPr>
+              <a:t>•  cadenas, su estructura— antes de la parte peligrosa y costosa de detonarlo o desensamblarlo. Cada</a:t>
+            </a:r>
+          </a:p>
+          <a:p>
+            <a:pPr>
+              <a:spcAft>
+                <a:spcPts val="600"/>
+              </a:spcAft>
+            </a:pPr>
+            <a:r>
+              <a:rPr sz="1500">
+                <a:solidFill>
+                  <a:srgbClr val="22282E"/>
+                </a:solidFill>
+              </a:rPr>
+              <a:t>•  técnica de esta clase da una pista, y juntas dibujan un primer retrato de la muestra.</a:t>
+            </a:r>
+          </a:p>
+          <a:p>
+            <a:pPr>
+              <a:spcAft>
+                <a:spcPts val="600"/>
+              </a:spcAft>
+            </a:pPr>
+            <a:r>
+              <a:rPr sz="1500">
+                <a:solidFill>
+                  <a:srgbClr val="22282E"/>
+                </a:solidFill>
+              </a:rPr>
+              <a:t>•  El primer gesto es calcular el hash de la muestra. Un hash criptográfico (SHA-256, MD5) es la</a:t>
+            </a:r>
+          </a:p>
+          <a:p>
+            <a:pPr>
+              <a:spcAft>
+                <a:spcPts val="600"/>
+              </a:spcAft>
+            </a:pPr>
+            <a:r>
+              <a:rPr sz="1500">
+                <a:solidFill>
+                  <a:srgbClr val="22282E"/>
+                </a:solidFill>
+              </a:rPr>
+              <a:t>•  huella dactilar exacta (Clase 051): sirve para identificar la muestra sin ambigüedad,</a:t>
             </a:r>
           </a:p>
         </p:txBody>
@@ -4211,7 +4572,7 @@
                   <a:srgbClr val="0B3D2E"/>
                 </a:solidFill>
               </a:rPr>
-              <a:t>🧰 Herramientas y preparación</a:t>
+              <a:t>📖 Definiciones y características</a:t>
             </a:r>
           </a:p>
         </p:txBody>
@@ -4249,67 +4610,82 @@
                   <a:srgbClr val="22282E"/>
                 </a:solidFill>
               </a:rPr>
-              <a:t>•  PEStudio y CFF Explorer / PE-bear para cabeceras, imports, recursos.</a:t>
-            </a:r>
-          </a:p>
-          <a:p>
-            <a:pPr>
-              <a:spcAft>
-                <a:spcPts val="600"/>
-              </a:spcAft>
-            </a:pPr>
-            <a:r>
-              <a:rPr sz="1500">
-                <a:solidFill>
-                  <a:srgbClr val="22282E"/>
-                </a:solidFill>
-              </a:rPr>
-              <a:t>•  strings (Sysinternals) o floss (extrae strings ofuscados).</a:t>
-            </a:r>
-          </a:p>
-          <a:p>
-            <a:pPr>
-              <a:spcAft>
-                <a:spcPts val="600"/>
-              </a:spcAft>
-            </a:pPr>
-            <a:r>
-              <a:rPr sz="1500">
-                <a:solidFill>
-                  <a:srgbClr val="22282E"/>
-                </a:solidFill>
-              </a:rPr>
-              <a:t>•  pestr, pehash, ssdeep, capa (Mandiant) para capacidades.</a:t>
-            </a:r>
-          </a:p>
-          <a:p>
-            <a:pPr>
-              <a:spcAft>
-                <a:spcPts val="600"/>
-              </a:spcAft>
-            </a:pPr>
-            <a:r>
-              <a:rPr sz="1500">
-                <a:solidFill>
-                  <a:srgbClr val="22282E"/>
-                </a:solidFill>
-              </a:rPr>
-              <a:t>•  DIE (Detect It Easy) y PEiD para detección de packer/compilador.</a:t>
-            </a:r>
-          </a:p>
-          <a:p>
-            <a:pPr>
-              <a:spcAft>
-                <a:spcPts val="600"/>
-              </a:spcAft>
-            </a:pPr>
-            <a:r>
-              <a:rPr sz="1500">
-                <a:solidFill>
-                  <a:srgbClr val="22282E"/>
-                </a:solidFill>
-              </a:rPr>
-              <a:t>•  Consulta en VirusTotal y MalwareBazaar por hash.</a:t>
+              <a:t>•  Hash criptográfico: huella única (SHA-256) de la muestra. Característica clave: identidad exacta.</a:t>
+            </a:r>
+          </a:p>
+          <a:p>
+            <a:pPr>
+              <a:spcAft>
+                <a:spcPts val="600"/>
+              </a:spcAft>
+            </a:pPr>
+            <a:r>
+              <a:rPr sz="1500">
+                <a:solidFill>
+                  <a:srgbClr val="22282E"/>
+                </a:solidFill>
+              </a:rPr>
+              <a:t>•  imphash: hash de la tabla de imports. Característica clave: agrupa variantes con el mismo compilador/estructura.</a:t>
+            </a:r>
+          </a:p>
+          <a:p>
+            <a:pPr>
+              <a:spcAft>
+                <a:spcPts val="600"/>
+              </a:spcAft>
+            </a:pPr>
+            <a:r>
+              <a:rPr sz="1500">
+                <a:solidFill>
+                  <a:srgbClr val="22282E"/>
+                </a:solidFill>
+              </a:rPr>
+              <a:t>•  ssdeep (fuzzy hash): mide similitud entre archivos. Característica clave: detecta parecidos, no idénticos.</a:t>
+            </a:r>
+          </a:p>
+          <a:p>
+            <a:pPr>
+              <a:spcAft>
+                <a:spcPts val="600"/>
+              </a:spcAft>
+            </a:pPr>
+            <a:r>
+              <a:rPr sz="1500">
+                <a:solidFill>
+                  <a:srgbClr val="22282E"/>
+                </a:solidFill>
+              </a:rPr>
+              <a:t>•  String: secuencia de caracteres legible en el binario. Característica clave: pistas de comportamiento.</a:t>
+            </a:r>
+          </a:p>
+          <a:p>
+            <a:pPr>
+              <a:spcAft>
+                <a:spcPts val="600"/>
+              </a:spcAft>
+            </a:pPr>
+            <a:r>
+              <a:rPr sz="1500">
+                <a:solidFill>
+                  <a:srgbClr val="22282E"/>
+                </a:solidFill>
+              </a:rPr>
+              <a:t>•  Entropía: medida de aleatoriedad (0–8 bits/byte). Característica clave: &gt;7 sugiere packing/cifrado.</a:t>
+            </a:r>
+          </a:p>
+          <a:p>
+            <a:pPr>
+              <a:spcAft>
+                <a:spcPts val="600"/>
+              </a:spcAft>
+            </a:pPr>
+            <a:r>
+              <a:rPr sz="1500">
+                <a:solidFill>
+                  <a:srgbClr val="22282E"/>
+                </a:solidFill>
+              </a:rPr>
+              <a:t>•  Import: función de una DLL que el binario usa. Característica clave: infiere capacidades.</a:t>
             </a:r>
           </a:p>
         </p:txBody>
@@ -4360,7 +4736,7 @@
                   <a:srgbClr val="0B3D2E"/>
                 </a:solidFill>
               </a:rPr>
-              <a:t>🧪 Laboratorio guiado</a:t>
+              <a:t>📔 Glosario</a:t>
             </a:r>
           </a:p>
         </p:txBody>
@@ -4398,97 +4774,97 @@
                   <a:srgbClr val="22282E"/>
                 </a:solidFill>
               </a:rPr>
-              <a:t>•  Trabaja sobre una muestra de referencia en tu VM aislada (por ejemplo la que uses en toda la parte):</a:t>
-            </a:r>
-          </a:p>
-          <a:p>
-            <a:pPr>
-              <a:spcAft>
-                <a:spcPts val="600"/>
-              </a:spcAft>
-            </a:pPr>
-            <a:r>
-              <a:rPr sz="1500">
-                <a:solidFill>
-                  <a:srgbClr val="22282E"/>
-                </a:solidFill>
-              </a:rPr>
-              <a:t>•  Calcula hashes: sha256sum muestra.bin, ssdeep muestra.bin. Guarda ambos en tu ficha.</a:t>
-            </a:r>
-          </a:p>
-          <a:p>
-            <a:pPr>
-              <a:spcAft>
-                <a:spcPts val="600"/>
-              </a:spcAft>
-            </a:pPr>
-            <a:r>
-              <a:rPr sz="1500">
-                <a:solidFill>
-                  <a:srgbClr val="22282E"/>
-                </a:solidFill>
-              </a:rPr>
-              <a:t>•  Extrae strings: floss muestra.bin &gt; strings.txt. Busca URLs, rutas (C:\Users\...), claves de registro, comandos y mensajes.</a:t>
-            </a:r>
-          </a:p>
-          <a:p>
-            <a:pPr>
-              <a:spcAft>
-                <a:spcPts val="600"/>
-              </a:spcAft>
-            </a:pPr>
-            <a:r>
-              <a:rPr sz="1500">
-                <a:solidFill>
-                  <a:srgbClr val="22282E"/>
-                </a:solidFill>
-              </a:rPr>
-              <a:t>•  En PEStudio, abre la muestra y revisa: imports marcados como sospechosos (CreateRemoteThread, WinExec, InternetOpen, CryptEncrypt), timestamp de compilación, y imphash.</a:t>
-            </a:r>
-          </a:p>
-          <a:p>
-            <a:pPr>
-              <a:spcAft>
-                <a:spcPts val="600"/>
-              </a:spcAft>
-            </a:pPr>
-            <a:r>
-              <a:rPr sz="1500">
-                <a:solidFill>
-                  <a:srgbClr val="22282E"/>
-                </a:solidFill>
-              </a:rPr>
-              <a:t>•  Calcula entropía por sección con DIE. Anota si .text o una sección extra supera ~7.0 (indicio de packing).</a:t>
-            </a:r>
-          </a:p>
-          <a:p>
-            <a:pPr>
-              <a:spcAft>
-                <a:spcPts val="600"/>
-              </a:spcAft>
-            </a:pPr>
-            <a:r>
-              <a:rPr sz="1500">
-                <a:solidFill>
-                  <a:srgbClr val="22282E"/>
-                </a:solidFill>
-              </a:rPr>
-              <a:t>•  Ejecuta capa muestra.bin para obtener capacidades mapeadas a ATT&amp;CK (p. ej. "encrypt data", "create process").</a:t>
-            </a:r>
-          </a:p>
-          <a:p>
-            <a:pPr>
-              <a:spcAft>
-                <a:spcPts val="600"/>
-              </a:spcAft>
-            </a:pPr>
-            <a:r>
-              <a:rPr sz="1500">
-                <a:solidFill>
-                  <a:srgbClr val="22282E"/>
-                </a:solidFill>
-              </a:rPr>
-              <a:t>•  Busca el SHA-256 en VirusTotal y MalwareBazaar: anota familia sugerida, número de detecciones y relaciones.</a:t>
+              <a:t>•  Término — Definición concisa</a:t>
+            </a:r>
+          </a:p>
+          <a:p>
+            <a:pPr>
+              <a:spcAft>
+                <a:spcPts val="600"/>
+              </a:spcAft>
+            </a:pPr>
+            <a:r>
+              <a:rPr sz="1500">
+                <a:solidFill>
+                  <a:srgbClr val="22282E"/>
+                </a:solidFill>
+              </a:rPr>
+              <a:t>•  Análisis estático — Examinar la muestra sin ejecutarla</a:t>
+            </a:r>
+          </a:p>
+          <a:p>
+            <a:pPr>
+              <a:spcAft>
+                <a:spcPts val="600"/>
+              </a:spcAft>
+            </a:pPr>
+            <a:r>
+              <a:rPr sz="1500">
+                <a:solidFill>
+                  <a:srgbClr val="22282E"/>
+                </a:solidFill>
+              </a:rPr>
+              <a:t>•  Hash criptográfico — Huella exacta (SHA-256); un byte cambia todo</a:t>
+            </a:r>
+          </a:p>
+          <a:p>
+            <a:pPr>
+              <a:spcAft>
+                <a:spcPts val="600"/>
+              </a:spcAft>
+            </a:pPr>
+            <a:r>
+              <a:rPr sz="1500">
+                <a:solidFill>
+                  <a:srgbClr val="22282E"/>
+                </a:solidFill>
+              </a:rPr>
+              <a:t>•  Fuzzy hashing (ssdeep) — Hash de similitud; agrupa variantes parecidas</a:t>
+            </a:r>
+          </a:p>
+          <a:p>
+            <a:pPr>
+              <a:spcAft>
+                <a:spcPts val="600"/>
+              </a:spcAft>
+            </a:pPr>
+            <a:r>
+              <a:rPr sz="1500">
+                <a:solidFill>
+                  <a:srgbClr val="22282E"/>
+                </a:solidFill>
+              </a:rPr>
+              <a:t>•  imphash — Hash de la tabla de imports; agrupa por APIs usadas</a:t>
+            </a:r>
+          </a:p>
+          <a:p>
+            <a:pPr>
+              <a:spcAft>
+                <a:spcPts val="600"/>
+              </a:spcAft>
+            </a:pPr>
+            <a:r>
+              <a:rPr sz="1500">
+                <a:solidFill>
+                  <a:srgbClr val="22282E"/>
+                </a:solidFill>
+              </a:rPr>
+              <a:t>•  Strings — Cadenas legibles (ASCII y Unicode); revelan intenciones</a:t>
+            </a:r>
+          </a:p>
+          <a:p>
+            <a:pPr>
+              <a:spcAft>
+                <a:spcPts val="600"/>
+              </a:spcAft>
+            </a:pPr>
+            <a:r>
+              <a:rPr sz="1500">
+                <a:solidFill>
+                  <a:srgbClr val="22282E"/>
+                </a:solidFill>
+              </a:rPr>
+              <a:t>•  Unicode / UTF-16 — Codificación de cadenas en Windows</a:t>
             </a:r>
           </a:p>
         </p:txBody>
@@ -4539,7 +4915,7 @@
                   <a:srgbClr val="0B3D2E"/>
                 </a:solidFill>
               </a:rPr>
-              <a:t>✍️ Ejercicios</a:t>
+              <a:t>🧰 Herramientas y preparación</a:t>
             </a:r>
           </a:p>
         </p:txBody>
@@ -4577,82 +4953,67 @@
                   <a:srgbClr val="22282E"/>
                 </a:solidFill>
               </a:rPr>
-              <a:t>•  Explica qué capacidad sugiere cada una de 6 APIs importadas.</a:t>
-            </a:r>
-          </a:p>
-          <a:p>
-            <a:pPr>
-              <a:spcAft>
-                <a:spcPts val="600"/>
-              </a:spcAft>
-            </a:pPr>
-            <a:r>
-              <a:rPr sz="1500">
-                <a:solidFill>
-                  <a:srgbClr val="22282E"/>
-                </a:solidFill>
-              </a:rPr>
-              <a:t>•  Compara el imphash de dos muestras y decide si podrían ser de la misma familia.</a:t>
-            </a:r>
-          </a:p>
-          <a:p>
-            <a:pPr>
-              <a:spcAft>
-                <a:spcPts val="600"/>
-              </a:spcAft>
-            </a:pPr>
-            <a:r>
-              <a:rPr sz="1500">
-                <a:solidFill>
-                  <a:srgbClr val="22282E"/>
-                </a:solidFill>
-              </a:rPr>
-              <a:t>•  Interpreta un strings.txt y extrae 5 IOCs candidatos.</a:t>
-            </a:r>
-          </a:p>
-          <a:p>
-            <a:pPr>
-              <a:spcAft>
-                <a:spcPts val="600"/>
-              </a:spcAft>
-            </a:pPr>
-            <a:r>
-              <a:rPr sz="1500">
-                <a:solidFill>
-                  <a:srgbClr val="22282E"/>
-                </a:solidFill>
-              </a:rPr>
-              <a:t>•  Justifica por qué una entropía de 7.9 en .rsrc es sospechosa.</a:t>
-            </a:r>
-          </a:p>
-          <a:p>
-            <a:pPr>
-              <a:spcAft>
-                <a:spcPts val="600"/>
-              </a:spcAft>
-            </a:pPr>
-            <a:r>
-              <a:rPr sz="1500">
-                <a:solidFill>
-                  <a:srgbClr val="22282E"/>
-                </a:solidFill>
-              </a:rPr>
-              <a:t>•  Usa capa y traduce 3 reglas disparadas a lenguaje llano.</a:t>
-            </a:r>
-          </a:p>
-          <a:p>
-            <a:pPr>
-              <a:spcAft>
-                <a:spcPts val="600"/>
-              </a:spcAft>
-            </a:pPr>
-            <a:r>
-              <a:rPr sz="1500">
-                <a:solidFill>
-                  <a:srgbClr val="22282E"/>
-                </a:solidFill>
-              </a:rPr>
-              <a:t>•  Documenta por qué el timestamp de compilación puede estar falseado.</a:t>
+              <a:t>•  PEStudio y CFF Explorer / PE-bear para cabeceras, imports, recursos.</a:t>
+            </a:r>
+          </a:p>
+          <a:p>
+            <a:pPr>
+              <a:spcAft>
+                <a:spcPts val="600"/>
+              </a:spcAft>
+            </a:pPr>
+            <a:r>
+              <a:rPr sz="1500">
+                <a:solidFill>
+                  <a:srgbClr val="22282E"/>
+                </a:solidFill>
+              </a:rPr>
+              <a:t>•  strings (Sysinternals) o floss (extrae strings ofuscados).</a:t>
+            </a:r>
+          </a:p>
+          <a:p>
+            <a:pPr>
+              <a:spcAft>
+                <a:spcPts val="600"/>
+              </a:spcAft>
+            </a:pPr>
+            <a:r>
+              <a:rPr sz="1500">
+                <a:solidFill>
+                  <a:srgbClr val="22282E"/>
+                </a:solidFill>
+              </a:rPr>
+              <a:t>•  pestr, pehash, ssdeep, capa (Mandiant) para capacidades.</a:t>
+            </a:r>
+          </a:p>
+          <a:p>
+            <a:pPr>
+              <a:spcAft>
+                <a:spcPts val="600"/>
+              </a:spcAft>
+            </a:pPr>
+            <a:r>
+              <a:rPr sz="1500">
+                <a:solidFill>
+                  <a:srgbClr val="22282E"/>
+                </a:solidFill>
+              </a:rPr>
+              <a:t>•  DIE (Detect It Easy) y PEiD para detección de packer/compilador.</a:t>
+            </a:r>
+          </a:p>
+          <a:p>
+            <a:pPr>
+              <a:spcAft>
+                <a:spcPts val="600"/>
+              </a:spcAft>
+            </a:pPr>
+            <a:r>
+              <a:rPr sz="1500">
+                <a:solidFill>
+                  <a:srgbClr val="22282E"/>
+                </a:solidFill>
+              </a:rPr>
+              <a:t>•  Consulta en VirusTotal y MalwareBazaar por hash.</a:t>
             </a:r>
           </a:p>
         </p:txBody>
@@ -4703,7 +5064,7 @@
                   <a:srgbClr val="0B3D2E"/>
                 </a:solidFill>
               </a:rPr>
-              <a:t>📝 Reto verificable</a:t>
+              <a:t>🧪 Laboratorio guiado</a:t>
             </a:r>
           </a:p>
         </p:txBody>
@@ -4741,22 +5102,97 @@
                   <a:srgbClr val="22282E"/>
                 </a:solidFill>
               </a:rPr>
-              <a:t>•  Produce una ficha de triaje estático de una muestra con: hashes (incl. imphash y ssdeep), 8 strings relevantes clasificados, 6 imports con su implicación, veredicto de packing con entropía, y familia sugerida por VT.</a:t>
-            </a:r>
-          </a:p>
-          <a:p>
-            <a:pPr>
-              <a:spcAft>
-                <a:spcPts val="600"/>
-              </a:spcAft>
-            </a:pPr>
-            <a:r>
-              <a:rPr sz="1500">
-                <a:solidFill>
-                  <a:srgbClr val="22282E"/>
-                </a:solidFill>
-              </a:rPr>
-              <a:t>•  Criterio de aceptación: cada afirmación de capacidad está respaldada por un import o string concreto citado en la ficha, y el veredicto de packing incluye el valor de entropía observado.</a:t>
+              <a:t>•  Trabaja sobre una muestra de referencia en tu VM aislada (por ejemplo la que uses en toda la parte):</a:t>
+            </a:r>
+          </a:p>
+          <a:p>
+            <a:pPr>
+              <a:spcAft>
+                <a:spcPts val="600"/>
+              </a:spcAft>
+            </a:pPr>
+            <a:r>
+              <a:rPr sz="1500">
+                <a:solidFill>
+                  <a:srgbClr val="22282E"/>
+                </a:solidFill>
+              </a:rPr>
+              <a:t>•  Calcula hashes: sha256sum muestra.bin, ssdeep muestra.bin. Guarda ambos en tu ficha.</a:t>
+            </a:r>
+          </a:p>
+          <a:p>
+            <a:pPr>
+              <a:spcAft>
+                <a:spcPts val="600"/>
+              </a:spcAft>
+            </a:pPr>
+            <a:r>
+              <a:rPr sz="1500">
+                <a:solidFill>
+                  <a:srgbClr val="22282E"/>
+                </a:solidFill>
+              </a:rPr>
+              <a:t>•  Extrae strings: floss muestra.bin &gt; strings.txt. Busca URLs, rutas (C:\Users\...), claves de registro, comandos y mensajes.</a:t>
+            </a:r>
+          </a:p>
+          <a:p>
+            <a:pPr>
+              <a:spcAft>
+                <a:spcPts val="600"/>
+              </a:spcAft>
+            </a:pPr>
+            <a:r>
+              <a:rPr sz="1500">
+                <a:solidFill>
+                  <a:srgbClr val="22282E"/>
+                </a:solidFill>
+              </a:rPr>
+              <a:t>•  En PEStudio, abre la muestra y revisa: imports marcados como sospechosos (CreateRemoteThread, WinExec, InternetOpen, CryptEncrypt), timestamp de compilación, y imphash.</a:t>
+            </a:r>
+          </a:p>
+          <a:p>
+            <a:pPr>
+              <a:spcAft>
+                <a:spcPts val="600"/>
+              </a:spcAft>
+            </a:pPr>
+            <a:r>
+              <a:rPr sz="1500">
+                <a:solidFill>
+                  <a:srgbClr val="22282E"/>
+                </a:solidFill>
+              </a:rPr>
+              <a:t>•  Calcula entropía por sección con DIE. Anota si .text o una sección extra supera ~7.0 (indicio de packing).</a:t>
+            </a:r>
+          </a:p>
+          <a:p>
+            <a:pPr>
+              <a:spcAft>
+                <a:spcPts val="600"/>
+              </a:spcAft>
+            </a:pPr>
+            <a:r>
+              <a:rPr sz="1500">
+                <a:solidFill>
+                  <a:srgbClr val="22282E"/>
+                </a:solidFill>
+              </a:rPr>
+              <a:t>•  Ejecuta capa muestra.bin para obtener capacidades mapeadas a ATT&amp;CK (p. ej. "encrypt data", "create process").</a:t>
+            </a:r>
+          </a:p>
+          <a:p>
+            <a:pPr>
+              <a:spcAft>
+                <a:spcPts val="600"/>
+              </a:spcAft>
+            </a:pPr>
+            <a:r>
+              <a:rPr sz="1500">
+                <a:solidFill>
+                  <a:srgbClr val="22282E"/>
+                </a:solidFill>
+              </a:rPr>
+              <a:t>•  Busca el SHA-256 en VirusTotal y MalwareBazaar: anota familia sugerida, número de detecciones y relaciones.</a:t>
             </a:r>
           </a:p>
         </p:txBody>
